--- a/lab-materials/lab04/files/lab04_writing_slides.pptx
+++ b/lab-materials/lab04/files/lab04_writing_slides.pptx
@@ -1518,13 +1518,41 @@
         </p:nvSpPr>
         <p:spPr>
           <a:xfrm>
-            <a:off x="1581912" y="2638044"/>
-            <a:ext cx="4271771" cy="3101982"/>
+            <a:off x="1097280" y="2638044"/>
+            <a:ext cx="4907280" cy="3465576"/>
           </a:xfrm>
         </p:spPr>
         <p:txBody>
           <a:bodyPr/>
-          <a:lstStyle/>
+          <a:lstStyle>
+            <a:lvl1pPr>
+              <a:defRPr sz="2000"/>
+            </a:lvl1pPr>
+            <a:lvl2pPr>
+              <a:defRPr sz="2000"/>
+            </a:lvl2pPr>
+            <a:lvl3pPr>
+              <a:defRPr sz="2000"/>
+            </a:lvl3pPr>
+            <a:lvl4pPr>
+              <a:defRPr sz="2000"/>
+            </a:lvl4pPr>
+            <a:lvl5pPr>
+              <a:defRPr sz="2000"/>
+            </a:lvl5pPr>
+            <a:lvl6pPr>
+              <a:defRPr sz="2000"/>
+            </a:lvl6pPr>
+            <a:lvl7pPr>
+              <a:defRPr sz="2000"/>
+            </a:lvl7pPr>
+            <a:lvl8pPr>
+              <a:defRPr sz="2000"/>
+            </a:lvl8pPr>
+            <a:lvl9pPr>
+              <a:defRPr sz="2000"/>
+            </a:lvl9pPr>
+          </a:lstStyle>
           <a:p>
             <a:pPr lvl="0"/>
             <a:r>
@@ -1575,13 +1603,41 @@
         </p:nvSpPr>
         <p:spPr>
           <a:xfrm>
-            <a:off x="6338315" y="2638044"/>
-            <a:ext cx="4270247" cy="3101982"/>
+            <a:off x="6187440" y="2638044"/>
+            <a:ext cx="4907280" cy="3465576"/>
           </a:xfrm>
         </p:spPr>
         <p:txBody>
           <a:bodyPr/>
-          <a:lstStyle/>
+          <a:lstStyle>
+            <a:lvl1pPr>
+              <a:defRPr sz="2000"/>
+            </a:lvl1pPr>
+            <a:lvl2pPr>
+              <a:defRPr sz="2000"/>
+            </a:lvl2pPr>
+            <a:lvl3pPr>
+              <a:defRPr sz="2000"/>
+            </a:lvl3pPr>
+            <a:lvl4pPr>
+              <a:defRPr sz="2000"/>
+            </a:lvl4pPr>
+            <a:lvl5pPr>
+              <a:defRPr sz="2000"/>
+            </a:lvl5pPr>
+            <a:lvl6pPr>
+              <a:defRPr sz="2000"/>
+            </a:lvl6pPr>
+            <a:lvl7pPr>
+              <a:defRPr sz="2000"/>
+            </a:lvl7pPr>
+            <a:lvl8pPr>
+              <a:defRPr sz="2000"/>
+            </a:lvl8pPr>
+            <a:lvl9pPr>
+              <a:defRPr sz="2000"/>
+            </a:lvl9pPr>
+          </a:lstStyle>
           <a:p>
             <a:pPr lvl="0"/>
             <a:r>
@@ -1722,8 +1778,8 @@
         </p:nvSpPr>
         <p:spPr>
           <a:xfrm>
-            <a:off x="1583436" y="2313433"/>
-            <a:ext cx="4270248" cy="704087"/>
+            <a:off x="1097280" y="2313433"/>
+            <a:ext cx="4907280" cy="548640"/>
           </a:xfrm>
         </p:spPr>
         <p:txBody>
@@ -1733,7 +1789,7 @@
           <a:lstStyle>
             <a:lvl1pPr marL="0" indent="0" algn="ctr">
               <a:buNone/>
-              <a:defRPr sz="1900" b="0" cap="all" spc="100" baseline="0">
+              <a:defRPr sz="2200" b="0" cap="all" spc="100" baseline="0">
                 <a:solidFill>
                   <a:schemeClr val="accent2">
                     <a:lumMod val="75000"/>
@@ -1743,35 +1799,35 @@
             </a:lvl1pPr>
             <a:lvl2pPr marL="457200" indent="0">
               <a:buNone/>
-              <a:defRPr sz="1900" b="1"/>
+              <a:defRPr sz="2200" b="1"/>
             </a:lvl2pPr>
             <a:lvl3pPr marL="914400" indent="0">
               <a:buNone/>
-              <a:defRPr sz="1800" b="1"/>
+              <a:defRPr sz="2200" b="1"/>
             </a:lvl3pPr>
             <a:lvl4pPr marL="1371600" indent="0">
               <a:buNone/>
-              <a:defRPr sz="1600" b="1"/>
+              <a:defRPr sz="2200" b="1"/>
             </a:lvl4pPr>
             <a:lvl5pPr marL="1828800" indent="0">
               <a:buNone/>
-              <a:defRPr sz="1600" b="1"/>
+              <a:defRPr sz="2200" b="1"/>
             </a:lvl5pPr>
             <a:lvl6pPr marL="2286000" indent="0">
               <a:buNone/>
-              <a:defRPr sz="1600" b="1"/>
+              <a:defRPr sz="2200" b="1"/>
             </a:lvl6pPr>
             <a:lvl7pPr marL="2743200" indent="0">
               <a:buNone/>
-              <a:defRPr sz="1600" b="1"/>
+              <a:defRPr sz="2200" b="1"/>
             </a:lvl7pPr>
             <a:lvl8pPr marL="3200400" indent="0">
               <a:buNone/>
-              <a:defRPr sz="1600" b="1"/>
+              <a:defRPr sz="2200" b="1"/>
             </a:lvl8pPr>
             <a:lvl9pPr marL="3657600" indent="0">
               <a:buNone/>
-              <a:defRPr sz="1600" b="1"/>
+              <a:defRPr sz="2200" b="1"/>
             </a:lvl9pPr>
           </a:lstStyle>
           <a:p>
@@ -1795,13 +1851,41 @@
         </p:nvSpPr>
         <p:spPr>
           <a:xfrm>
-            <a:off x="1583436" y="3143250"/>
-            <a:ext cx="4270248" cy="2596776"/>
+            <a:off x="1097280" y="2926080"/>
+            <a:ext cx="4907280" cy="3177540"/>
           </a:xfrm>
         </p:spPr>
         <p:txBody>
           <a:bodyPr/>
-          <a:lstStyle/>
+          <a:lstStyle>
+            <a:lvl1pPr>
+              <a:defRPr sz="2000"/>
+            </a:lvl1pPr>
+            <a:lvl2pPr>
+              <a:defRPr sz="2000"/>
+            </a:lvl2pPr>
+            <a:lvl3pPr>
+              <a:defRPr sz="2000"/>
+            </a:lvl3pPr>
+            <a:lvl4pPr>
+              <a:defRPr sz="2000"/>
+            </a:lvl4pPr>
+            <a:lvl5pPr>
+              <a:defRPr sz="2000"/>
+            </a:lvl5pPr>
+            <a:lvl6pPr>
+              <a:defRPr sz="2000"/>
+            </a:lvl6pPr>
+            <a:lvl7pPr>
+              <a:defRPr sz="2000"/>
+            </a:lvl7pPr>
+            <a:lvl8pPr>
+              <a:defRPr sz="2000"/>
+            </a:lvl8pPr>
+            <a:lvl9pPr>
+              <a:defRPr sz="2000"/>
+            </a:lvl9pPr>
+          </a:lstStyle>
           <a:p>
             <a:pPr lvl="0"/>
             <a:r>
@@ -1852,16 +1936,40 @@
         </p:nvSpPr>
         <p:spPr>
           <a:xfrm>
-            <a:off x="6338316" y="3143250"/>
-            <a:ext cx="4253484" cy="2596776"/>
+            <a:off x="6187440" y="2926080"/>
+            <a:ext cx="4907280" cy="3177540"/>
           </a:xfrm>
         </p:spPr>
         <p:txBody>
           <a:bodyPr/>
           <a:lstStyle>
             <a:lvl5pPr>
-              <a:defRPr/>
+              <a:defRPr sz="2000"/>
             </a:lvl5pPr>
+            <a:lvl1pPr>
+              <a:defRPr sz="2000"/>
+            </a:lvl1pPr>
+            <a:lvl2pPr>
+              <a:defRPr sz="2000"/>
+            </a:lvl2pPr>
+            <a:lvl3pPr>
+              <a:defRPr sz="2000"/>
+            </a:lvl3pPr>
+            <a:lvl4pPr>
+              <a:defRPr sz="2000"/>
+            </a:lvl4pPr>
+            <a:lvl6pPr>
+              <a:defRPr sz="2000"/>
+            </a:lvl6pPr>
+            <a:lvl7pPr>
+              <a:defRPr sz="2000"/>
+            </a:lvl7pPr>
+            <a:lvl8pPr>
+              <a:defRPr sz="2000"/>
+            </a:lvl8pPr>
+            <a:lvl9pPr>
+              <a:defRPr sz="2000"/>
+            </a:lvl9pPr>
           </a:lstStyle>
           <a:p>
             <a:pPr lvl="0"/>
@@ -1913,8 +2021,8 @@
         </p:nvSpPr>
         <p:spPr>
           <a:xfrm>
-            <a:off x="6338316" y="2313433"/>
-            <a:ext cx="4270248" cy="704087"/>
+            <a:off x="6187440" y="2313433"/>
+            <a:ext cx="4907280" cy="548640"/>
           </a:xfrm>
         </p:spPr>
         <p:txBody>
@@ -1924,7 +2032,7 @@
           <a:lstStyle>
             <a:lvl1pPr marL="0" indent="0" algn="ctr">
               <a:buNone/>
-              <a:defRPr sz="1900" b="0" cap="all" spc="100" baseline="0">
+              <a:defRPr sz="2200" b="0" cap="all" spc="100" baseline="0">
                 <a:solidFill>
                   <a:schemeClr val="accent2">
                     <a:lumMod val="75000"/>
@@ -1934,35 +2042,35 @@
             </a:lvl1pPr>
             <a:lvl2pPr marL="457200" indent="0">
               <a:buNone/>
-              <a:defRPr sz="1900" b="1"/>
+              <a:defRPr sz="2200" b="1"/>
             </a:lvl2pPr>
             <a:lvl3pPr marL="914400" indent="0">
               <a:buNone/>
-              <a:defRPr sz="1800" b="1"/>
+              <a:defRPr sz="2200" b="1"/>
             </a:lvl3pPr>
             <a:lvl4pPr marL="1371600" indent="0">
               <a:buNone/>
-              <a:defRPr sz="1600" b="1"/>
+              <a:defRPr sz="2200" b="1"/>
             </a:lvl4pPr>
             <a:lvl5pPr marL="1828800" indent="0">
               <a:buNone/>
-              <a:defRPr sz="1600" b="1"/>
+              <a:defRPr sz="2200" b="1"/>
             </a:lvl5pPr>
             <a:lvl6pPr marL="2286000" indent="0">
               <a:buNone/>
-              <a:defRPr sz="1600" b="1"/>
+              <a:defRPr sz="2200" b="1"/>
             </a:lvl6pPr>
             <a:lvl7pPr marL="2743200" indent="0">
               <a:buNone/>
-              <a:defRPr sz="1600" b="1"/>
+              <a:defRPr sz="2200" b="1"/>
             </a:lvl7pPr>
             <a:lvl8pPr marL="3200400" indent="0">
               <a:buNone/>
-              <a:defRPr sz="1600" b="1"/>
+              <a:defRPr sz="2200" b="1"/>
             </a:lvl8pPr>
             <a:lvl9pPr marL="3657600" indent="0">
               <a:buNone/>
-              <a:defRPr sz="1600" b="1"/>
+              <a:defRPr sz="2200" b="1"/>
             </a:lvl9pPr>
           </a:lstStyle>
           <a:p>
@@ -2049,7 +2157,12 @@
             <p:ph type="title"/>
           </p:nvPr>
         </p:nvSpPr>
-        <p:spPr/>
+        <p:spPr>
+          <a:xfrm>
+            <a:off x="1097280" y="964692"/>
+            <a:ext cx="9997440" cy="1188720"/>
+          </a:xfrm>
+        </p:spPr>
         <p:txBody>
           <a:bodyPr/>
           <a:lstStyle/>
@@ -4189,11 +4302,11 @@
             </a:r>
           </a:p>
           <a:p>
-            <a:pPr lvl="0" indent="0" marL="1270000">
+            <a:pPr lvl="0" indent="0" marL="0">
               <a:buNone/>
             </a:pPr>
             <a:r>
-              <a:rPr sz="2000"/>
+              <a:rPr/>
               <a:t>Two hundred and four students participated in the study. All of the students were undergraduates in psychology. Roughly 84% of the participants were female. The materials used were the Beck Depression Inventory and the Beck Anxiety Inventory. The participants were brought into a large classroom and asked to fill out the inventories.</a:t>
             </a:r>
           </a:p>
@@ -4235,11 +4348,11 @@
             </a:r>
           </a:p>
           <a:p>
-            <a:pPr lvl="0" indent="0" marL="1270000">
+            <a:pPr lvl="0" indent="0" marL="0">
               <a:buNone/>
             </a:pPr>
             <a:r>
-              <a:rPr sz="2000"/>
+              <a:rPr/>
               <a:t>Two hundred and four undergraduate psychology students (84% female) participated in the study. The participants were brought into a large classroom and asked to fill out the Beck Depression Inventory and the Beck Anxiety Inventory.</a:t>
             </a:r>
           </a:p>
